--- a/在你寶座前(崇拜版).pptx
+++ b/在你寶座前(崇拜版).pptx
@@ -169,7 +169,7 @@
           <a:lstStyle/>
           <a:p>
             <a:r>
-              <a:rPr lang="en-US" altLang="zh-TW" smtClean="0"/>
+              <a:rPr lang="en-US" altLang="zh-TW"/>
               <a:t>Click to edit Master title style</a:t>
             </a:r>
             <a:endParaRPr lang="zh-TW" altLang="en-US"/>
@@ -288,7 +288,7 @@
           </a:lstStyle>
           <a:p>
             <a:r>
-              <a:rPr lang="en-US" altLang="zh-TW" smtClean="0"/>
+              <a:rPr lang="en-US" altLang="zh-TW"/>
               <a:t>Click to edit Master subtitle style</a:t>
             </a:r>
             <a:endParaRPr lang="zh-TW" altLang="en-US"/>
@@ -313,7 +313,7 @@
             <a:fld id="{5EB9643F-852B-4059-9F2F-1212C809C47E}" type="datetimeFigureOut">
               <a:rPr lang="zh-TW" altLang="en-US" smtClean="0"/>
               <a:pPr/>
-              <a:t>2023/5/6</a:t>
+              <a:t>2025/7/19</a:t>
             </a:fld>
             <a:endParaRPr lang="zh-TW" altLang="en-US"/>
           </a:p>
@@ -408,7 +408,7 @@
           <a:lstStyle/>
           <a:p>
             <a:r>
-              <a:rPr lang="en-US" altLang="zh-TW" smtClean="0"/>
+              <a:rPr lang="en-US" altLang="zh-TW"/>
               <a:t>Click to edit Master title style</a:t>
             </a:r>
             <a:endParaRPr lang="zh-TW" altLang="en-US"/>
@@ -432,35 +432,35 @@
           <a:p>
             <a:pPr lvl="0"/>
             <a:r>
-              <a:rPr lang="en-US" altLang="zh-TW" smtClean="0"/>
+              <a:rPr lang="en-US" altLang="zh-TW"/>
               <a:t>Edit Master text styles</a:t>
             </a:r>
           </a:p>
           <a:p>
             <a:pPr lvl="1"/>
             <a:r>
-              <a:rPr lang="en-US" altLang="zh-TW" smtClean="0"/>
+              <a:rPr lang="en-US" altLang="zh-TW"/>
               <a:t>Second level</a:t>
             </a:r>
           </a:p>
           <a:p>
             <a:pPr lvl="2"/>
             <a:r>
-              <a:rPr lang="en-US" altLang="zh-TW" smtClean="0"/>
+              <a:rPr lang="en-US" altLang="zh-TW"/>
               <a:t>Third level</a:t>
             </a:r>
           </a:p>
           <a:p>
             <a:pPr lvl="3"/>
             <a:r>
-              <a:rPr lang="en-US" altLang="zh-TW" smtClean="0"/>
+              <a:rPr lang="en-US" altLang="zh-TW"/>
               <a:t>Fourth level</a:t>
             </a:r>
           </a:p>
           <a:p>
             <a:pPr lvl="4"/>
             <a:r>
-              <a:rPr lang="en-US" altLang="zh-TW" smtClean="0"/>
+              <a:rPr lang="en-US" altLang="zh-TW"/>
               <a:t>Fifth level</a:t>
             </a:r>
             <a:endParaRPr lang="zh-TW" altLang="en-US"/>
@@ -485,7 +485,7 @@
             <a:fld id="{5EB9643F-852B-4059-9F2F-1212C809C47E}" type="datetimeFigureOut">
               <a:rPr lang="zh-TW" altLang="en-US" smtClean="0"/>
               <a:pPr/>
-              <a:t>2023/5/6</a:t>
+              <a:t>2025/7/19</a:t>
             </a:fld>
             <a:endParaRPr lang="zh-TW" altLang="en-US"/>
           </a:p>
@@ -585,7 +585,7 @@
           <a:lstStyle/>
           <a:p>
             <a:r>
-              <a:rPr lang="en-US" altLang="zh-TW" smtClean="0"/>
+              <a:rPr lang="en-US" altLang="zh-TW"/>
               <a:t>Click to edit Master title style</a:t>
             </a:r>
             <a:endParaRPr lang="zh-TW" altLang="en-US"/>
@@ -614,35 +614,35 @@
           <a:p>
             <a:pPr lvl="0"/>
             <a:r>
-              <a:rPr lang="en-US" altLang="zh-TW" smtClean="0"/>
+              <a:rPr lang="en-US" altLang="zh-TW"/>
               <a:t>Edit Master text styles</a:t>
             </a:r>
           </a:p>
           <a:p>
             <a:pPr lvl="1"/>
             <a:r>
-              <a:rPr lang="en-US" altLang="zh-TW" smtClean="0"/>
+              <a:rPr lang="en-US" altLang="zh-TW"/>
               <a:t>Second level</a:t>
             </a:r>
           </a:p>
           <a:p>
             <a:pPr lvl="2"/>
             <a:r>
-              <a:rPr lang="en-US" altLang="zh-TW" smtClean="0"/>
+              <a:rPr lang="en-US" altLang="zh-TW"/>
               <a:t>Third level</a:t>
             </a:r>
           </a:p>
           <a:p>
             <a:pPr lvl="3"/>
             <a:r>
-              <a:rPr lang="en-US" altLang="zh-TW" smtClean="0"/>
+              <a:rPr lang="en-US" altLang="zh-TW"/>
               <a:t>Fourth level</a:t>
             </a:r>
           </a:p>
           <a:p>
             <a:pPr lvl="4"/>
             <a:r>
-              <a:rPr lang="en-US" altLang="zh-TW" smtClean="0"/>
+              <a:rPr lang="en-US" altLang="zh-TW"/>
               <a:t>Fifth level</a:t>
             </a:r>
             <a:endParaRPr lang="zh-TW" altLang="en-US"/>
@@ -667,7 +667,7 @@
             <a:fld id="{5EB9643F-852B-4059-9F2F-1212C809C47E}" type="datetimeFigureOut">
               <a:rPr lang="zh-TW" altLang="en-US" smtClean="0"/>
               <a:pPr/>
-              <a:t>2023/5/6</a:t>
+              <a:t>2025/7/19</a:t>
             </a:fld>
             <a:endParaRPr lang="zh-TW" altLang="en-US"/>
           </a:p>
@@ -762,7 +762,7 @@
           <a:lstStyle/>
           <a:p>
             <a:r>
-              <a:rPr lang="en-US" altLang="zh-TW" smtClean="0"/>
+              <a:rPr lang="en-US" altLang="zh-TW"/>
               <a:t>Click to edit Master title style</a:t>
             </a:r>
             <a:endParaRPr lang="zh-TW" altLang="en-US"/>
@@ -786,35 +786,35 @@
           <a:p>
             <a:pPr lvl="0"/>
             <a:r>
-              <a:rPr lang="en-US" altLang="zh-TW" smtClean="0"/>
+              <a:rPr lang="en-US" altLang="zh-TW"/>
               <a:t>Edit Master text styles</a:t>
             </a:r>
           </a:p>
           <a:p>
             <a:pPr lvl="1"/>
             <a:r>
-              <a:rPr lang="en-US" altLang="zh-TW" smtClean="0"/>
+              <a:rPr lang="en-US" altLang="zh-TW"/>
               <a:t>Second level</a:t>
             </a:r>
           </a:p>
           <a:p>
             <a:pPr lvl="2"/>
             <a:r>
-              <a:rPr lang="en-US" altLang="zh-TW" smtClean="0"/>
+              <a:rPr lang="en-US" altLang="zh-TW"/>
               <a:t>Third level</a:t>
             </a:r>
           </a:p>
           <a:p>
             <a:pPr lvl="3"/>
             <a:r>
-              <a:rPr lang="en-US" altLang="zh-TW" smtClean="0"/>
+              <a:rPr lang="en-US" altLang="zh-TW"/>
               <a:t>Fourth level</a:t>
             </a:r>
           </a:p>
           <a:p>
             <a:pPr lvl="4"/>
             <a:r>
-              <a:rPr lang="en-US" altLang="zh-TW" smtClean="0"/>
+              <a:rPr lang="en-US" altLang="zh-TW"/>
               <a:t>Fifth level</a:t>
             </a:r>
             <a:endParaRPr lang="zh-TW" altLang="en-US"/>
@@ -839,7 +839,7 @@
             <a:fld id="{5EB9643F-852B-4059-9F2F-1212C809C47E}" type="datetimeFigureOut">
               <a:rPr lang="zh-TW" altLang="en-US" smtClean="0"/>
               <a:pPr/>
-              <a:t>2023/5/6</a:t>
+              <a:t>2025/7/19</a:t>
             </a:fld>
             <a:endParaRPr lang="zh-TW" altLang="en-US"/>
           </a:p>
@@ -943,7 +943,7 @@
           </a:lstStyle>
           <a:p>
             <a:r>
-              <a:rPr lang="en-US" altLang="zh-TW" smtClean="0"/>
+              <a:rPr lang="en-US" altLang="zh-TW"/>
               <a:t>Click to edit Master title style</a:t>
             </a:r>
             <a:endParaRPr lang="zh-TW" altLang="en-US"/>
@@ -1063,7 +1063,7 @@
           <a:p>
             <a:pPr lvl="0"/>
             <a:r>
-              <a:rPr lang="en-US" altLang="zh-TW" smtClean="0"/>
+              <a:rPr lang="en-US" altLang="zh-TW"/>
               <a:t>Edit Master text styles</a:t>
             </a:r>
           </a:p>
@@ -1087,7 +1087,7 @@
             <a:fld id="{5EB9643F-852B-4059-9F2F-1212C809C47E}" type="datetimeFigureOut">
               <a:rPr lang="zh-TW" altLang="en-US" smtClean="0"/>
               <a:pPr/>
-              <a:t>2023/5/6</a:t>
+              <a:t>2025/7/19</a:t>
             </a:fld>
             <a:endParaRPr lang="zh-TW" altLang="en-US"/>
           </a:p>
@@ -1182,7 +1182,7 @@
           <a:lstStyle/>
           <a:p>
             <a:r>
-              <a:rPr lang="en-US" altLang="zh-TW" smtClean="0"/>
+              <a:rPr lang="en-US" altLang="zh-TW"/>
               <a:t>Click to edit Master title style</a:t>
             </a:r>
             <a:endParaRPr lang="zh-TW" altLang="en-US"/>
@@ -1239,35 +1239,35 @@
           <a:p>
             <a:pPr lvl="0"/>
             <a:r>
-              <a:rPr lang="en-US" altLang="zh-TW" smtClean="0"/>
+              <a:rPr lang="en-US" altLang="zh-TW"/>
               <a:t>Edit Master text styles</a:t>
             </a:r>
           </a:p>
           <a:p>
             <a:pPr lvl="1"/>
             <a:r>
-              <a:rPr lang="en-US" altLang="zh-TW" smtClean="0"/>
+              <a:rPr lang="en-US" altLang="zh-TW"/>
               <a:t>Second level</a:t>
             </a:r>
           </a:p>
           <a:p>
             <a:pPr lvl="2"/>
             <a:r>
-              <a:rPr lang="en-US" altLang="zh-TW" smtClean="0"/>
+              <a:rPr lang="en-US" altLang="zh-TW"/>
               <a:t>Third level</a:t>
             </a:r>
           </a:p>
           <a:p>
             <a:pPr lvl="3"/>
             <a:r>
-              <a:rPr lang="en-US" altLang="zh-TW" smtClean="0"/>
+              <a:rPr lang="en-US" altLang="zh-TW"/>
               <a:t>Fourth level</a:t>
             </a:r>
           </a:p>
           <a:p>
             <a:pPr lvl="4"/>
             <a:r>
-              <a:rPr lang="en-US" altLang="zh-TW" smtClean="0"/>
+              <a:rPr lang="en-US" altLang="zh-TW"/>
               <a:t>Fifth level</a:t>
             </a:r>
             <a:endParaRPr lang="zh-TW" altLang="en-US"/>
@@ -1324,35 +1324,35 @@
           <a:p>
             <a:pPr lvl="0"/>
             <a:r>
-              <a:rPr lang="en-US" altLang="zh-TW" smtClean="0"/>
+              <a:rPr lang="en-US" altLang="zh-TW"/>
               <a:t>Edit Master text styles</a:t>
             </a:r>
           </a:p>
           <a:p>
             <a:pPr lvl="1"/>
             <a:r>
-              <a:rPr lang="en-US" altLang="zh-TW" smtClean="0"/>
+              <a:rPr lang="en-US" altLang="zh-TW"/>
               <a:t>Second level</a:t>
             </a:r>
           </a:p>
           <a:p>
             <a:pPr lvl="2"/>
             <a:r>
-              <a:rPr lang="en-US" altLang="zh-TW" smtClean="0"/>
+              <a:rPr lang="en-US" altLang="zh-TW"/>
               <a:t>Third level</a:t>
             </a:r>
           </a:p>
           <a:p>
             <a:pPr lvl="3"/>
             <a:r>
-              <a:rPr lang="en-US" altLang="zh-TW" smtClean="0"/>
+              <a:rPr lang="en-US" altLang="zh-TW"/>
               <a:t>Fourth level</a:t>
             </a:r>
           </a:p>
           <a:p>
             <a:pPr lvl="4"/>
             <a:r>
-              <a:rPr lang="en-US" altLang="zh-TW" smtClean="0"/>
+              <a:rPr lang="en-US" altLang="zh-TW"/>
               <a:t>Fifth level</a:t>
             </a:r>
             <a:endParaRPr lang="zh-TW" altLang="en-US"/>
@@ -1377,7 +1377,7 @@
             <a:fld id="{5EB9643F-852B-4059-9F2F-1212C809C47E}" type="datetimeFigureOut">
               <a:rPr lang="zh-TW" altLang="en-US" smtClean="0"/>
               <a:pPr/>
-              <a:t>2023/5/6</a:t>
+              <a:t>2025/7/19</a:t>
             </a:fld>
             <a:endParaRPr lang="zh-TW" altLang="en-US"/>
           </a:p>
@@ -1476,7 +1476,7 @@
           </a:lstStyle>
           <a:p>
             <a:r>
-              <a:rPr lang="en-US" altLang="zh-TW" smtClean="0"/>
+              <a:rPr lang="en-US" altLang="zh-TW"/>
               <a:t>Click to edit Master title style</a:t>
             </a:r>
             <a:endParaRPr lang="zh-TW" altLang="en-US"/>
@@ -1542,7 +1542,7 @@
           <a:p>
             <a:pPr lvl="0"/>
             <a:r>
-              <a:rPr lang="en-US" altLang="zh-TW" smtClean="0"/>
+              <a:rPr lang="en-US" altLang="zh-TW"/>
               <a:t>Edit Master text styles</a:t>
             </a:r>
           </a:p>
@@ -1598,35 +1598,35 @@
           <a:p>
             <a:pPr lvl="0"/>
             <a:r>
-              <a:rPr lang="en-US" altLang="zh-TW" smtClean="0"/>
+              <a:rPr lang="en-US" altLang="zh-TW"/>
               <a:t>Edit Master text styles</a:t>
             </a:r>
           </a:p>
           <a:p>
             <a:pPr lvl="1"/>
             <a:r>
-              <a:rPr lang="en-US" altLang="zh-TW" smtClean="0"/>
+              <a:rPr lang="en-US" altLang="zh-TW"/>
               <a:t>Second level</a:t>
             </a:r>
           </a:p>
           <a:p>
             <a:pPr lvl="2"/>
             <a:r>
-              <a:rPr lang="en-US" altLang="zh-TW" smtClean="0"/>
+              <a:rPr lang="en-US" altLang="zh-TW"/>
               <a:t>Third level</a:t>
             </a:r>
           </a:p>
           <a:p>
             <a:pPr lvl="3"/>
             <a:r>
-              <a:rPr lang="en-US" altLang="zh-TW" smtClean="0"/>
+              <a:rPr lang="en-US" altLang="zh-TW"/>
               <a:t>Fourth level</a:t>
             </a:r>
           </a:p>
           <a:p>
             <a:pPr lvl="4"/>
             <a:r>
-              <a:rPr lang="en-US" altLang="zh-TW" smtClean="0"/>
+              <a:rPr lang="en-US" altLang="zh-TW"/>
               <a:t>Fifth level</a:t>
             </a:r>
             <a:endParaRPr lang="zh-TW" altLang="en-US"/>
@@ -1692,7 +1692,7 @@
           <a:p>
             <a:pPr lvl="0"/>
             <a:r>
-              <a:rPr lang="en-US" altLang="zh-TW" smtClean="0"/>
+              <a:rPr lang="en-US" altLang="zh-TW"/>
               <a:t>Edit Master text styles</a:t>
             </a:r>
           </a:p>
@@ -1748,35 +1748,35 @@
           <a:p>
             <a:pPr lvl="0"/>
             <a:r>
-              <a:rPr lang="en-US" altLang="zh-TW" smtClean="0"/>
+              <a:rPr lang="en-US" altLang="zh-TW"/>
               <a:t>Edit Master text styles</a:t>
             </a:r>
           </a:p>
           <a:p>
             <a:pPr lvl="1"/>
             <a:r>
-              <a:rPr lang="en-US" altLang="zh-TW" smtClean="0"/>
+              <a:rPr lang="en-US" altLang="zh-TW"/>
               <a:t>Second level</a:t>
             </a:r>
           </a:p>
           <a:p>
             <a:pPr lvl="2"/>
             <a:r>
-              <a:rPr lang="en-US" altLang="zh-TW" smtClean="0"/>
+              <a:rPr lang="en-US" altLang="zh-TW"/>
               <a:t>Third level</a:t>
             </a:r>
           </a:p>
           <a:p>
             <a:pPr lvl="3"/>
             <a:r>
-              <a:rPr lang="en-US" altLang="zh-TW" smtClean="0"/>
+              <a:rPr lang="en-US" altLang="zh-TW"/>
               <a:t>Fourth level</a:t>
             </a:r>
           </a:p>
           <a:p>
             <a:pPr lvl="4"/>
             <a:r>
-              <a:rPr lang="en-US" altLang="zh-TW" smtClean="0"/>
+              <a:rPr lang="en-US" altLang="zh-TW"/>
               <a:t>Fifth level</a:t>
             </a:r>
             <a:endParaRPr lang="zh-TW" altLang="en-US"/>
@@ -1801,7 +1801,7 @@
             <a:fld id="{5EB9643F-852B-4059-9F2F-1212C809C47E}" type="datetimeFigureOut">
               <a:rPr lang="zh-TW" altLang="en-US" smtClean="0"/>
               <a:pPr/>
-              <a:t>2023/5/6</a:t>
+              <a:t>2025/7/19</a:t>
             </a:fld>
             <a:endParaRPr lang="zh-TW" altLang="en-US"/>
           </a:p>
@@ -1896,7 +1896,7 @@
           <a:lstStyle/>
           <a:p>
             <a:r>
-              <a:rPr lang="en-US" altLang="zh-TW" smtClean="0"/>
+              <a:rPr lang="en-US" altLang="zh-TW"/>
               <a:t>Click to edit Master title style</a:t>
             </a:r>
             <a:endParaRPr lang="zh-TW" altLang="en-US"/>
@@ -1921,7 +1921,7 @@
             <a:fld id="{5EB9643F-852B-4059-9F2F-1212C809C47E}" type="datetimeFigureOut">
               <a:rPr lang="zh-TW" altLang="en-US" smtClean="0"/>
               <a:pPr/>
-              <a:t>2023/5/6</a:t>
+              <a:t>2025/7/19</a:t>
             </a:fld>
             <a:endParaRPr lang="zh-TW" altLang="en-US"/>
           </a:p>
@@ -2018,7 +2018,7 @@
             <a:fld id="{5EB9643F-852B-4059-9F2F-1212C809C47E}" type="datetimeFigureOut">
               <a:rPr lang="zh-TW" altLang="en-US" smtClean="0"/>
               <a:pPr/>
-              <a:t>2023/5/6</a:t>
+              <a:t>2025/7/19</a:t>
             </a:fld>
             <a:endParaRPr lang="zh-TW" altLang="en-US"/>
           </a:p>
@@ -2122,7 +2122,7 @@
           </a:lstStyle>
           <a:p>
             <a:r>
-              <a:rPr lang="en-US" altLang="zh-TW" smtClean="0"/>
+              <a:rPr lang="en-US" altLang="zh-TW"/>
               <a:t>Click to edit Master title style</a:t>
             </a:r>
             <a:endParaRPr lang="zh-TW" altLang="en-US"/>
@@ -2179,35 +2179,35 @@
           <a:p>
             <a:pPr lvl="0"/>
             <a:r>
-              <a:rPr lang="en-US" altLang="zh-TW" smtClean="0"/>
+              <a:rPr lang="en-US" altLang="zh-TW"/>
               <a:t>Edit Master text styles</a:t>
             </a:r>
           </a:p>
           <a:p>
             <a:pPr lvl="1"/>
             <a:r>
-              <a:rPr lang="en-US" altLang="zh-TW" smtClean="0"/>
+              <a:rPr lang="en-US" altLang="zh-TW"/>
               <a:t>Second level</a:t>
             </a:r>
           </a:p>
           <a:p>
             <a:pPr lvl="2"/>
             <a:r>
-              <a:rPr lang="en-US" altLang="zh-TW" smtClean="0"/>
+              <a:rPr lang="en-US" altLang="zh-TW"/>
               <a:t>Third level</a:t>
             </a:r>
           </a:p>
           <a:p>
             <a:pPr lvl="3"/>
             <a:r>
-              <a:rPr lang="en-US" altLang="zh-TW" smtClean="0"/>
+              <a:rPr lang="en-US" altLang="zh-TW"/>
               <a:t>Fourth level</a:t>
             </a:r>
           </a:p>
           <a:p>
             <a:pPr lvl="4"/>
             <a:r>
-              <a:rPr lang="en-US" altLang="zh-TW" smtClean="0"/>
+              <a:rPr lang="en-US" altLang="zh-TW"/>
               <a:t>Fifth level</a:t>
             </a:r>
             <a:endParaRPr lang="zh-TW" altLang="en-US"/>
@@ -2273,7 +2273,7 @@
           <a:p>
             <a:pPr lvl="0"/>
             <a:r>
-              <a:rPr lang="en-US" altLang="zh-TW" smtClean="0"/>
+              <a:rPr lang="en-US" altLang="zh-TW"/>
               <a:t>Edit Master text styles</a:t>
             </a:r>
           </a:p>
@@ -2297,7 +2297,7 @@
             <a:fld id="{5EB9643F-852B-4059-9F2F-1212C809C47E}" type="datetimeFigureOut">
               <a:rPr lang="zh-TW" altLang="en-US" smtClean="0"/>
               <a:pPr/>
-              <a:t>2023/5/6</a:t>
+              <a:t>2025/7/19</a:t>
             </a:fld>
             <a:endParaRPr lang="zh-TW" altLang="en-US"/>
           </a:p>
@@ -2401,7 +2401,7 @@
           </a:lstStyle>
           <a:p>
             <a:r>
-              <a:rPr lang="en-US" altLang="zh-TW" smtClean="0"/>
+              <a:rPr lang="en-US" altLang="zh-TW"/>
               <a:t>Click to edit Master title style</a:t>
             </a:r>
             <a:endParaRPr lang="zh-TW" altLang="en-US"/>
@@ -2466,7 +2466,7 @@
           </a:lstStyle>
           <a:p>
             <a:r>
-              <a:rPr lang="en-US" altLang="zh-TW" smtClean="0"/>
+              <a:rPr lang="en-US" altLang="zh-TW"/>
               <a:t>Click icon to add picture</a:t>
             </a:r>
             <a:endParaRPr lang="zh-TW" altLang="en-US"/>
@@ -2532,7 +2532,7 @@
           <a:p>
             <a:pPr lvl="0"/>
             <a:r>
-              <a:rPr lang="en-US" altLang="zh-TW" smtClean="0"/>
+              <a:rPr lang="en-US" altLang="zh-TW"/>
               <a:t>Edit Master text styles</a:t>
             </a:r>
           </a:p>
@@ -2556,7 +2556,7 @@
             <a:fld id="{5EB9643F-852B-4059-9F2F-1212C809C47E}" type="datetimeFigureOut">
               <a:rPr lang="zh-TW" altLang="en-US" smtClean="0"/>
               <a:pPr/>
-              <a:t>2023/5/6</a:t>
+              <a:t>2025/7/19</a:t>
             </a:fld>
             <a:endParaRPr lang="zh-TW" altLang="en-US"/>
           </a:p>
@@ -2671,10 +2671,9 @@
           <a:lstStyle/>
           <a:p>
             <a:r>
-              <a:rPr lang="zh-TW" altLang="en-US" smtClean="0"/>
+              <a:rPr lang="zh-TW" altLang="en-US"/>
               <a:t>按一下以編輯母片標題樣式</a:t>
             </a:r>
-            <a:endParaRPr lang="zh-TW" altLang="en-US"/>
           </a:p>
         </p:txBody>
       </p:sp>
@@ -2705,38 +2704,37 @@
           <a:p>
             <a:pPr lvl="0"/>
             <a:r>
-              <a:rPr lang="zh-TW" altLang="en-US" smtClean="0"/>
+              <a:rPr lang="zh-TW" altLang="en-US"/>
               <a:t>按一下以編輯母片文字樣式</a:t>
             </a:r>
           </a:p>
           <a:p>
             <a:pPr lvl="1"/>
             <a:r>
-              <a:rPr lang="zh-TW" altLang="en-US" smtClean="0"/>
+              <a:rPr lang="zh-TW" altLang="en-US"/>
               <a:t>第二層</a:t>
             </a:r>
           </a:p>
           <a:p>
             <a:pPr lvl="2"/>
             <a:r>
-              <a:rPr lang="zh-TW" altLang="en-US" smtClean="0"/>
+              <a:rPr lang="zh-TW" altLang="en-US"/>
               <a:t>第三層</a:t>
             </a:r>
           </a:p>
           <a:p>
             <a:pPr lvl="3"/>
             <a:r>
-              <a:rPr lang="zh-TW" altLang="en-US" smtClean="0"/>
+              <a:rPr lang="zh-TW" altLang="en-US"/>
               <a:t>第四層</a:t>
             </a:r>
           </a:p>
           <a:p>
             <a:pPr lvl="4"/>
             <a:r>
-              <a:rPr lang="zh-TW" altLang="en-US" smtClean="0"/>
+              <a:rPr lang="zh-TW" altLang="en-US"/>
               <a:t>第五層</a:t>
             </a:r>
-            <a:endParaRPr lang="zh-TW" altLang="en-US"/>
           </a:p>
         </p:txBody>
       </p:sp>
@@ -2776,7 +2774,7 @@
             <a:fld id="{5EB9643F-852B-4059-9F2F-1212C809C47E}" type="datetimeFigureOut">
               <a:rPr lang="zh-TW" altLang="en-US" smtClean="0"/>
               <a:pPr/>
-              <a:t>2023/5/6</a:t>
+              <a:t>2025/7/19</a:t>
             </a:fld>
             <a:endParaRPr lang="zh-TW" altLang="en-US"/>
           </a:p>
@@ -3175,7 +3173,7 @@
           <a:lstStyle/>
           <a:p>
             <a:r>
-              <a:rPr lang="zh-TW" altLang="en-US" sz="7200" b="1" i="1" dirty="0" smtClean="0">
+              <a:rPr lang="zh-TW" altLang="en-US" sz="7200" b="1" i="1" dirty="0">
                 <a:solidFill>
                   <a:srgbClr val="660033"/>
                 </a:solidFill>
@@ -3209,7 +3207,7 @@
               <a:t>祢</a:t>
             </a:r>
             <a:r>
-              <a:rPr lang="zh-TW" altLang="en-US" sz="7200" b="1" i="1" dirty="0" smtClean="0">
+              <a:rPr lang="zh-TW" altLang="en-US" sz="7200" b="1" i="1" dirty="0">
                 <a:solidFill>
                   <a:srgbClr val="660033"/>
                 </a:solidFill>
@@ -3223,24 +3221,7 @@
                 <a:latin typeface="微軟正黑體" pitchFamily="34" charset="-120"/>
                 <a:ea typeface="微軟正黑體" pitchFamily="34" charset="-120"/>
               </a:rPr>
-              <a:t>寶</a:t>
-            </a:r>
-            <a:r>
-              <a:rPr lang="zh-TW" altLang="en-US" sz="7200" b="1" i="1" dirty="0">
-                <a:solidFill>
-                  <a:srgbClr val="660033"/>
-                </a:solidFill>
-                <a:effectLst>
-                  <a:outerShdw blurRad="38100" dist="38100" dir="2700000" algn="tl">
-                    <a:srgbClr val="000000">
-                      <a:alpha val="43137"/>
-                    </a:srgbClr>
-                  </a:outerShdw>
-                </a:effectLst>
-                <a:latin typeface="微軟正黑體" pitchFamily="34" charset="-120"/>
-                <a:ea typeface="微軟正黑體" pitchFamily="34" charset="-120"/>
-              </a:rPr>
-              <a:t>座前</a:t>
+              <a:t>寶座前</a:t>
             </a:r>
           </a:p>
         </p:txBody>
@@ -3301,7 +3282,7 @@
               <a:buNone/>
             </a:pPr>
             <a:r>
-              <a:rPr lang="zh-TW" altLang="en-US" sz="6400" b="1" dirty="0" smtClean="0">
+              <a:rPr lang="zh-TW" altLang="en-US" sz="6400" b="1" dirty="0">
                 <a:solidFill>
                   <a:srgbClr val="660033"/>
                 </a:solidFill>
@@ -3321,24 +3302,14 @@
               <a:t>祢</a:t>
             </a:r>
             <a:r>
-              <a:rPr lang="zh-TW" altLang="en-US" sz="6400" b="1" dirty="0" smtClean="0">
+              <a:rPr lang="zh-TW" altLang="en-US" sz="6400" b="1" dirty="0">
                 <a:solidFill>
                   <a:srgbClr val="660033"/>
                 </a:solidFill>
                 <a:latin typeface="微軟正黑體" pitchFamily="34" charset="-120"/>
                 <a:ea typeface="微軟正黑體" pitchFamily="34" charset="-120"/>
               </a:rPr>
-              <a:t>寶</a:t>
-            </a:r>
-            <a:r>
-              <a:rPr lang="zh-TW" altLang="en-US" sz="6400" b="1" dirty="0">
-                <a:solidFill>
-                  <a:srgbClr val="660033"/>
-                </a:solidFill>
-                <a:latin typeface="微軟正黑體" pitchFamily="34" charset="-120"/>
-                <a:ea typeface="微軟正黑體" pitchFamily="34" charset="-120"/>
-              </a:rPr>
-              <a:t>座前  </a:t>
+              <a:t>寶座前  </a:t>
             </a:r>
             <a:endParaRPr lang="en-US" altLang="zh-TW" sz="6400" b="1" dirty="0">
               <a:solidFill>
@@ -3396,7 +3367,7 @@
           <a:p>
             <a:pPr algn="ctr"/>
             <a:r>
-              <a:rPr lang="en-US" sz="3600" b="1" dirty="0" smtClean="0">
+              <a:rPr lang="en-US" sz="3600" b="1" dirty="0">
                 <a:solidFill>
                   <a:srgbClr val="660033"/>
                 </a:solidFill>
@@ -3406,17 +3377,17 @@
               <a:t>( </a:t>
             </a:r>
             <a:r>
-              <a:rPr lang="zh-CN" altLang="en-US" sz="3600" b="1" dirty="0" smtClean="0">
+              <a:rPr lang="zh-CN" altLang="en-US" sz="3600" b="1" dirty="0">
                 <a:solidFill>
                   <a:srgbClr val="660033"/>
                 </a:solidFill>
                 <a:latin typeface="Microsoft JhengHei" panose="020B0604030504040204" pitchFamily="34" charset="-120"/>
                 <a:ea typeface="Microsoft JhengHei" panose="020B0604030504040204" pitchFamily="34" charset="-120"/>
               </a:rPr>
-              <a:t>正</a:t>
-            </a:r>
-            <a:r>
-              <a:rPr lang="en-US" sz="3600" b="1" dirty="0" smtClean="0">
+              <a:t>正歌</a:t>
+            </a:r>
+            <a:r>
+              <a:rPr lang="en-US" sz="3600" b="1" dirty="0">
                 <a:solidFill>
                   <a:srgbClr val="660033"/>
                 </a:solidFill>
@@ -3548,7 +3519,7 @@
           <a:p>
             <a:pPr algn="ctr"/>
             <a:r>
-              <a:rPr lang="en-US" sz="3600" b="1" dirty="0" smtClean="0">
+              <a:rPr lang="en-US" sz="3600" b="1" dirty="0">
                 <a:solidFill>
                   <a:srgbClr val="660033"/>
                 </a:solidFill>
@@ -3558,17 +3529,17 @@
               <a:t>( </a:t>
             </a:r>
             <a:r>
-              <a:rPr lang="zh-CN" altLang="en-US" sz="3600" b="1" dirty="0" smtClean="0">
+              <a:rPr lang="zh-CN" altLang="en-US" sz="3600" b="1" dirty="0">
                 <a:solidFill>
                   <a:srgbClr val="660033"/>
                 </a:solidFill>
                 <a:latin typeface="Microsoft JhengHei" panose="020B0604030504040204" pitchFamily="34" charset="-120"/>
                 <a:ea typeface="Microsoft JhengHei" panose="020B0604030504040204" pitchFamily="34" charset="-120"/>
               </a:rPr>
-              <a:t>正</a:t>
-            </a:r>
-            <a:r>
-              <a:rPr lang="en-US" sz="3600" b="1" dirty="0" smtClean="0">
+              <a:t>正歌</a:t>
+            </a:r>
+            <a:r>
+              <a:rPr lang="en-US" sz="3600" b="1" dirty="0">
                 <a:solidFill>
                   <a:srgbClr val="660033"/>
                 </a:solidFill>
@@ -3642,7 +3613,7 @@
               <a:buNone/>
             </a:pPr>
             <a:r>
-              <a:rPr lang="zh-TW" altLang="en-US" sz="6400" b="1" dirty="0" smtClean="0">
+              <a:rPr lang="zh-TW" altLang="en-US" sz="6400" b="1" dirty="0">
                 <a:solidFill>
                   <a:srgbClr val="660033"/>
                 </a:solidFill>
@@ -3662,24 +3633,14 @@
               <a:t>祢</a:t>
             </a:r>
             <a:r>
-              <a:rPr lang="zh-TW" altLang="en-US" sz="6400" b="1" dirty="0" smtClean="0">
+              <a:rPr lang="zh-TW" altLang="en-US" sz="6400" b="1" dirty="0">
                 <a:solidFill>
                   <a:srgbClr val="660033"/>
                 </a:solidFill>
                 <a:latin typeface="微軟正黑體" pitchFamily="34" charset="-120"/>
                 <a:ea typeface="微軟正黑體" pitchFamily="34" charset="-120"/>
               </a:rPr>
-              <a:t>寶</a:t>
-            </a:r>
-            <a:r>
-              <a:rPr lang="zh-TW" altLang="en-US" sz="6400" b="1" dirty="0">
-                <a:solidFill>
-                  <a:srgbClr val="660033"/>
-                </a:solidFill>
-                <a:latin typeface="微軟正黑體" pitchFamily="34" charset="-120"/>
-                <a:ea typeface="微軟正黑體" pitchFamily="34" charset="-120"/>
-              </a:rPr>
-              <a:t>座前</a:t>
+              <a:t>寶座前</a:t>
             </a:r>
             <a:r>
               <a:rPr lang="en-US" altLang="zh-TW" sz="6400" b="1" dirty="0">
@@ -3740,7 +3701,7 @@
           <a:p>
             <a:pPr algn="ctr"/>
             <a:r>
-              <a:rPr lang="en-US" sz="3600" b="1" dirty="0" smtClean="0">
+              <a:rPr lang="en-US" sz="3600" b="1" dirty="0">
                 <a:solidFill>
                   <a:srgbClr val="660033"/>
                 </a:solidFill>
@@ -3750,17 +3711,17 @@
               <a:t>( </a:t>
             </a:r>
             <a:r>
-              <a:rPr lang="zh-CN" altLang="en-US" sz="3600" b="1" dirty="0" smtClean="0">
+              <a:rPr lang="zh-CN" altLang="en-US" sz="3600" b="1" dirty="0">
                 <a:solidFill>
                   <a:srgbClr val="660033"/>
                 </a:solidFill>
                 <a:latin typeface="Microsoft JhengHei" panose="020B0604030504040204" pitchFamily="34" charset="-120"/>
                 <a:ea typeface="Microsoft JhengHei" panose="020B0604030504040204" pitchFamily="34" charset="-120"/>
               </a:rPr>
-              <a:t>正</a:t>
-            </a:r>
-            <a:r>
-              <a:rPr lang="en-US" sz="3600" b="1" dirty="0" smtClean="0">
+              <a:t>正歌</a:t>
+            </a:r>
+            <a:r>
+              <a:rPr lang="en-US" sz="3600" b="1" dirty="0">
                 <a:solidFill>
                   <a:srgbClr val="660033"/>
                 </a:solidFill>
@@ -3892,7 +3853,7 @@
           <a:p>
             <a:pPr algn="ctr"/>
             <a:r>
-              <a:rPr lang="en-US" sz="3600" b="1" dirty="0" smtClean="0">
+              <a:rPr lang="en-US" sz="3600" b="1" dirty="0">
                 <a:solidFill>
                   <a:srgbClr val="660033"/>
                 </a:solidFill>
@@ -3902,17 +3863,17 @@
               <a:t>( </a:t>
             </a:r>
             <a:r>
-              <a:rPr lang="zh-CN" altLang="en-US" sz="3600" b="1" dirty="0" smtClean="0">
+              <a:rPr lang="zh-CN" altLang="en-US" sz="3600" b="1" dirty="0">
                 <a:solidFill>
                   <a:srgbClr val="660033"/>
                 </a:solidFill>
                 <a:latin typeface="Microsoft JhengHei" panose="020B0604030504040204" pitchFamily="34" charset="-120"/>
                 <a:ea typeface="Microsoft JhengHei" panose="020B0604030504040204" pitchFamily="34" charset="-120"/>
               </a:rPr>
-              <a:t>正</a:t>
-            </a:r>
-            <a:r>
-              <a:rPr lang="en-US" sz="3600" b="1" dirty="0" smtClean="0">
+              <a:t>正歌</a:t>
+            </a:r>
+            <a:r>
+              <a:rPr lang="en-US" sz="3600" b="1" dirty="0">
                 <a:solidFill>
                   <a:srgbClr val="660033"/>
                 </a:solidFill>
@@ -4051,7 +4012,7 @@
           <a:p>
             <a:pPr algn="ctr"/>
             <a:r>
-              <a:rPr lang="en-US" sz="3600" b="1" dirty="0" smtClean="0">
+              <a:rPr lang="en-US" sz="3600" b="1" dirty="0">
                 <a:solidFill>
                   <a:srgbClr val="660033"/>
                 </a:solidFill>
@@ -4061,34 +4022,24 @@
               <a:t>( </a:t>
             </a:r>
             <a:r>
-              <a:rPr lang="zh-CN" altLang="en-US" sz="3600" b="1" dirty="0" smtClean="0">
+              <a:rPr lang="zh-CN" altLang="en-US" sz="3600" b="1" dirty="0">
                 <a:solidFill>
                   <a:srgbClr val="660033"/>
                 </a:solidFill>
                 <a:latin typeface="Microsoft JhengHei" panose="020B0604030504040204" pitchFamily="34" charset="-120"/>
                 <a:ea typeface="Microsoft JhengHei" panose="020B0604030504040204" pitchFamily="34" charset="-120"/>
               </a:rPr>
-              <a:t>副</a:t>
-            </a:r>
-            <a:r>
-              <a:rPr lang="en-US" sz="3600" b="1" dirty="0" smtClean="0">
+              <a:t>副歌</a:t>
+            </a:r>
+            <a:r>
+              <a:rPr lang="en-US" sz="3600" b="1" dirty="0">
                 <a:solidFill>
                   <a:srgbClr val="660033"/>
                 </a:solidFill>
                 <a:latin typeface="Microsoft JhengHei" panose="020B0604030504040204" pitchFamily="34" charset="-120"/>
                 <a:ea typeface="Microsoft JhengHei" panose="020B0604030504040204" pitchFamily="34" charset="-120"/>
               </a:rPr>
-              <a:t> </a:t>
-            </a:r>
-            <a:r>
-              <a:rPr lang="en-US" sz="3600" b="1" dirty="0" smtClean="0">
-                <a:solidFill>
-                  <a:srgbClr val="660033"/>
-                </a:solidFill>
-                <a:latin typeface="Microsoft JhengHei" panose="020B0604030504040204" pitchFamily="34" charset="-120"/>
-                <a:ea typeface="Microsoft JhengHei" panose="020B0604030504040204" pitchFamily="34" charset="-120"/>
-              </a:rPr>
-              <a:t>)</a:t>
+              <a:t> )</a:t>
             </a:r>
             <a:endParaRPr lang="vi-VN" sz="3600" b="1" dirty="0">
               <a:solidFill>
@@ -4191,7 +4142,7 @@
           <a:p>
             <a:pPr algn="ctr"/>
             <a:r>
-              <a:rPr lang="en-US" sz="3600" b="1" dirty="0" smtClean="0">
+              <a:rPr lang="en-US" sz="3600" b="1" dirty="0">
                 <a:solidFill>
                   <a:srgbClr val="660033"/>
                 </a:solidFill>
@@ -4201,34 +4152,24 @@
               <a:t>( </a:t>
             </a:r>
             <a:r>
-              <a:rPr lang="zh-CN" altLang="en-US" sz="3600" b="1" dirty="0" smtClean="0">
+              <a:rPr lang="zh-CN" altLang="en-US" sz="3600" b="1" dirty="0">
                 <a:solidFill>
                   <a:srgbClr val="660033"/>
                 </a:solidFill>
                 <a:latin typeface="Microsoft JhengHei" panose="020B0604030504040204" pitchFamily="34" charset="-120"/>
                 <a:ea typeface="Microsoft JhengHei" panose="020B0604030504040204" pitchFamily="34" charset="-120"/>
               </a:rPr>
-              <a:t>副</a:t>
-            </a:r>
-            <a:r>
-              <a:rPr lang="en-US" sz="3600" b="1" dirty="0" smtClean="0">
+              <a:t>副歌</a:t>
+            </a:r>
+            <a:r>
+              <a:rPr lang="en-US" sz="3600" b="1" dirty="0">
                 <a:solidFill>
                   <a:srgbClr val="660033"/>
                 </a:solidFill>
                 <a:latin typeface="Microsoft JhengHei" panose="020B0604030504040204" pitchFamily="34" charset="-120"/>
                 <a:ea typeface="Microsoft JhengHei" panose="020B0604030504040204" pitchFamily="34" charset="-120"/>
               </a:rPr>
-              <a:t> </a:t>
-            </a:r>
-            <a:r>
-              <a:rPr lang="en-US" sz="3600" b="1" dirty="0" smtClean="0">
-                <a:solidFill>
-                  <a:srgbClr val="660033"/>
-                </a:solidFill>
-                <a:latin typeface="Microsoft JhengHei" panose="020B0604030504040204" pitchFamily="34" charset="-120"/>
-                <a:ea typeface="Microsoft JhengHei" panose="020B0604030504040204" pitchFamily="34" charset="-120"/>
-              </a:rPr>
-              <a:t>)</a:t>
+              <a:t> )</a:t>
             </a:r>
             <a:endParaRPr lang="vi-VN" sz="3600" b="1" dirty="0">
               <a:solidFill>
@@ -4360,7 +4301,7 @@
           <a:p>
             <a:pPr algn="ctr"/>
             <a:r>
-              <a:rPr lang="en-US" sz="3600" b="1" dirty="0" smtClean="0">
+              <a:rPr lang="en-US" sz="3600" b="1" dirty="0">
                 <a:solidFill>
                   <a:srgbClr val="660033"/>
                 </a:solidFill>
@@ -4370,34 +4311,24 @@
               <a:t>( </a:t>
             </a:r>
             <a:r>
-              <a:rPr lang="zh-CN" altLang="en-US" sz="3600" b="1" dirty="0" smtClean="0">
+              <a:rPr lang="zh-CN" altLang="en-US" sz="3600" b="1" dirty="0">
                 <a:solidFill>
                   <a:srgbClr val="660033"/>
                 </a:solidFill>
                 <a:latin typeface="Microsoft JhengHei" panose="020B0604030504040204" pitchFamily="34" charset="-120"/>
                 <a:ea typeface="Microsoft JhengHei" panose="020B0604030504040204" pitchFamily="34" charset="-120"/>
               </a:rPr>
-              <a:t>副</a:t>
-            </a:r>
-            <a:r>
-              <a:rPr lang="en-US" sz="3600" b="1" dirty="0" smtClean="0">
+              <a:t>副歌</a:t>
+            </a:r>
+            <a:r>
+              <a:rPr lang="en-US" sz="3600" b="1" dirty="0">
                 <a:solidFill>
                   <a:srgbClr val="660033"/>
                 </a:solidFill>
                 <a:latin typeface="Microsoft JhengHei" panose="020B0604030504040204" pitchFamily="34" charset="-120"/>
                 <a:ea typeface="Microsoft JhengHei" panose="020B0604030504040204" pitchFamily="34" charset="-120"/>
               </a:rPr>
-              <a:t> </a:t>
-            </a:r>
-            <a:r>
-              <a:rPr lang="en-US" sz="3600" b="1" dirty="0" smtClean="0">
-                <a:solidFill>
-                  <a:srgbClr val="660033"/>
-                </a:solidFill>
-                <a:latin typeface="Microsoft JhengHei" panose="020B0604030504040204" pitchFamily="34" charset="-120"/>
-                <a:ea typeface="Microsoft JhengHei" panose="020B0604030504040204" pitchFamily="34" charset="-120"/>
-              </a:rPr>
-              <a:t>)</a:t>
+              <a:t> )</a:t>
             </a:r>
             <a:endParaRPr lang="vi-VN" sz="3600" b="1" dirty="0">
               <a:solidFill>
@@ -4522,7 +4453,7 @@
           <a:p>
             <a:pPr algn="ctr"/>
             <a:r>
-              <a:rPr lang="en-US" sz="3600" b="1" dirty="0" smtClean="0">
+              <a:rPr lang="en-US" sz="3600" b="1" dirty="0">
                 <a:solidFill>
                   <a:srgbClr val="660033"/>
                 </a:solidFill>
@@ -4532,34 +4463,24 @@
               <a:t>( </a:t>
             </a:r>
             <a:r>
-              <a:rPr lang="zh-CN" altLang="en-US" sz="3600" b="1" dirty="0" smtClean="0">
+              <a:rPr lang="zh-CN" altLang="en-US" sz="3600" b="1" dirty="0">
                 <a:solidFill>
                   <a:srgbClr val="660033"/>
                 </a:solidFill>
                 <a:latin typeface="Microsoft JhengHei" panose="020B0604030504040204" pitchFamily="34" charset="-120"/>
                 <a:ea typeface="Microsoft JhengHei" panose="020B0604030504040204" pitchFamily="34" charset="-120"/>
               </a:rPr>
-              <a:t>副</a:t>
-            </a:r>
-            <a:r>
-              <a:rPr lang="en-US" sz="3600" b="1" dirty="0" smtClean="0">
+              <a:t>副歌</a:t>
+            </a:r>
+            <a:r>
+              <a:rPr lang="en-US" sz="3600" b="1" dirty="0">
                 <a:solidFill>
                   <a:srgbClr val="660033"/>
                 </a:solidFill>
                 <a:latin typeface="Microsoft JhengHei" panose="020B0604030504040204" pitchFamily="34" charset="-120"/>
                 <a:ea typeface="Microsoft JhengHei" panose="020B0604030504040204" pitchFamily="34" charset="-120"/>
               </a:rPr>
-              <a:t> </a:t>
-            </a:r>
-            <a:r>
-              <a:rPr lang="en-US" sz="3600" b="1" dirty="0" smtClean="0">
-                <a:solidFill>
-                  <a:srgbClr val="660033"/>
-                </a:solidFill>
-                <a:latin typeface="Microsoft JhengHei" panose="020B0604030504040204" pitchFamily="34" charset="-120"/>
-                <a:ea typeface="Microsoft JhengHei" panose="020B0604030504040204" pitchFamily="34" charset="-120"/>
-              </a:rPr>
-              <a:t>)</a:t>
+              <a:t> )</a:t>
             </a:r>
             <a:endParaRPr lang="vi-VN" sz="3600" b="1" dirty="0">
               <a:solidFill>
